--- a/01_FoundationProjects/MFL03_DC_Motor_Speed_Control/MFL03_DC_Motor_Speed_Control.pptx
+++ b/01_FoundationProjects/MFL03_DC_Motor_Speed_Control/MFL03_DC_Motor_Speed_Control.pptx
@@ -266,7 +266,7 @@
           <a:p>
             <a:fld id="{375049E3-AEF5-412D-9F98-5201579F9569}" type="datetimeFigureOut">
               <a:rPr lang="en-GB" smtClean="0"/>
-              <a:t>26/12/2025</a:t>
+              <a:t>18/01/2026</a:t>
             </a:fld>
             <a:endParaRPr lang="en-GB"/>
           </a:p>
@@ -466,7 +466,7 @@
           <a:p>
             <a:fld id="{375049E3-AEF5-412D-9F98-5201579F9569}" type="datetimeFigureOut">
               <a:rPr lang="en-GB" smtClean="0"/>
-              <a:t>26/12/2025</a:t>
+              <a:t>18/01/2026</a:t>
             </a:fld>
             <a:endParaRPr lang="en-GB"/>
           </a:p>
@@ -676,7 +676,7 @@
           <a:p>
             <a:fld id="{375049E3-AEF5-412D-9F98-5201579F9569}" type="datetimeFigureOut">
               <a:rPr lang="en-GB" smtClean="0"/>
-              <a:t>26/12/2025</a:t>
+              <a:t>18/01/2026</a:t>
             </a:fld>
             <a:endParaRPr lang="en-GB"/>
           </a:p>
@@ -876,7 +876,7 @@
           <a:p>
             <a:fld id="{375049E3-AEF5-412D-9F98-5201579F9569}" type="datetimeFigureOut">
               <a:rPr lang="en-GB" smtClean="0"/>
-              <a:t>26/12/2025</a:t>
+              <a:t>18/01/2026</a:t>
             </a:fld>
             <a:endParaRPr lang="en-GB"/>
           </a:p>
@@ -1152,7 +1152,7 @@
           <a:p>
             <a:fld id="{375049E3-AEF5-412D-9F98-5201579F9569}" type="datetimeFigureOut">
               <a:rPr lang="en-GB" smtClean="0"/>
-              <a:t>26/12/2025</a:t>
+              <a:t>18/01/2026</a:t>
             </a:fld>
             <a:endParaRPr lang="en-GB"/>
           </a:p>
@@ -1420,7 +1420,7 @@
           <a:p>
             <a:fld id="{375049E3-AEF5-412D-9F98-5201579F9569}" type="datetimeFigureOut">
               <a:rPr lang="en-GB" smtClean="0"/>
-              <a:t>26/12/2025</a:t>
+              <a:t>18/01/2026</a:t>
             </a:fld>
             <a:endParaRPr lang="en-GB"/>
           </a:p>
@@ -1835,7 +1835,7 @@
           <a:p>
             <a:fld id="{375049E3-AEF5-412D-9F98-5201579F9569}" type="datetimeFigureOut">
               <a:rPr lang="en-GB" smtClean="0"/>
-              <a:t>26/12/2025</a:t>
+              <a:t>18/01/2026</a:t>
             </a:fld>
             <a:endParaRPr lang="en-GB"/>
           </a:p>
@@ -1977,7 +1977,7 @@
           <a:p>
             <a:fld id="{375049E3-AEF5-412D-9F98-5201579F9569}" type="datetimeFigureOut">
               <a:rPr lang="en-GB" smtClean="0"/>
-              <a:t>26/12/2025</a:t>
+              <a:t>18/01/2026</a:t>
             </a:fld>
             <a:endParaRPr lang="en-GB"/>
           </a:p>
@@ -2090,7 +2090,7 @@
           <a:p>
             <a:fld id="{375049E3-AEF5-412D-9F98-5201579F9569}" type="datetimeFigureOut">
               <a:rPr lang="en-GB" smtClean="0"/>
-              <a:t>26/12/2025</a:t>
+              <a:t>18/01/2026</a:t>
             </a:fld>
             <a:endParaRPr lang="en-GB"/>
           </a:p>
@@ -2403,7 +2403,7 @@
           <a:p>
             <a:fld id="{375049E3-AEF5-412D-9F98-5201579F9569}" type="datetimeFigureOut">
               <a:rPr lang="en-GB" smtClean="0"/>
-              <a:t>26/12/2025</a:t>
+              <a:t>18/01/2026</a:t>
             </a:fld>
             <a:endParaRPr lang="en-GB"/>
           </a:p>
@@ -2692,7 +2692,7 @@
           <a:p>
             <a:fld id="{375049E3-AEF5-412D-9F98-5201579F9569}" type="datetimeFigureOut">
               <a:rPr lang="en-GB" smtClean="0"/>
-              <a:t>26/12/2025</a:t>
+              <a:t>18/01/2026</a:t>
             </a:fld>
             <a:endParaRPr lang="en-GB"/>
           </a:p>
@@ -2935,7 +2935,7 @@
           <a:p>
             <a:fld id="{375049E3-AEF5-412D-9F98-5201579F9569}" type="datetimeFigureOut">
               <a:rPr lang="en-GB" smtClean="0"/>
-              <a:t>26/12/2025</a:t>
+              <a:t>18/01/2026</a:t>
             </a:fld>
             <a:endParaRPr lang="en-GB"/>
           </a:p>
@@ -4264,7 +4264,7 @@
           <a:p>
             <a:r>
               <a:rPr lang="en-GB" sz="2000" b="1" dirty="0"/>
-              <a:t>Execute the code (ML03.ino) in the motion </a:t>
+              <a:t>Execute the code in the motion </a:t>
             </a:r>
           </a:p>
           <a:p>
@@ -4454,7 +4454,7 @@
         </p:nvSpPr>
         <p:spPr>
           <a:xfrm>
-            <a:off x="765712" y="5695893"/>
+            <a:off x="938618" y="5681767"/>
             <a:ext cx="4885191" cy="954107"/>
           </a:xfrm>
           <a:prstGeom prst="rect">
@@ -4481,16 +4481,16 @@
           </a:lstStyle>
           <a:p>
             <a:r>
-              <a:rPr lang="en-GB">
+              <a:rPr lang="en-GB" dirty="0">
                 <a:hlinkClick r:id="rId3"/>
               </a:rPr>
-              <a:t>https://github.com/info-zas/zas-robotics-motion/blob/main/01_FoundationProjects/MFL03/MFL03/MFL03.ino</a:t>
-            </a:r>
-            <a:endParaRPr lang="en-GB"/>
-          </a:p>
-          <a:p>
+              <a:t>https://github.com/info-zas/zas-robotics-motion/tree/main/01_FoundationProjects/MFL03_DC_Motor_Speed_Control/MFL03_DC_Motor_Speed_Control</a:t>
+            </a:r>
             <a:endParaRPr lang="en-GB" dirty="0"/>
           </a:p>
+          <a:p>
+            <a:endParaRPr lang="en-GB" dirty="0"/>
+          </a:p>
         </p:txBody>
       </p:sp>
       <p:sp>
@@ -4515,7 +4515,7 @@
           <a:lstStyle/>
           <a:p>
             <a:r>
-              <a:rPr lang="en-GB"/>
+              <a:rPr lang="en-GB" dirty="0"/>
               <a:t>06/12/2025</a:t>
             </a:r>
           </a:p>
@@ -4682,8 +4682,8 @@
         </p:nvSpPr>
         <p:spPr bwMode="auto">
           <a:xfrm>
-            <a:off x="765712" y="5404768"/>
-            <a:ext cx="3952568" cy="369332"/>
+            <a:off x="765711" y="5404768"/>
+            <a:ext cx="5380497" cy="276999"/>
           </a:xfrm>
           <a:prstGeom prst="rect">
             <a:avLst/>
@@ -4794,8 +4794,16 @@
               <a:defRPr/>
             </a:pPr>
             <a:r>
-              <a:rPr lang="en-GB" b="1" dirty="0"/>
-              <a:t>Code for Lesson MFL03 (MFL03.ino):</a:t>
+              <a:rPr lang="en-GB" sz="1200" b="1" dirty="0"/>
+              <a:t>Code for Lesson MFL03 (</a:t>
+            </a:r>
+            <a:r>
+              <a:rPr lang="en-US" sz="1200" b="1" dirty="0"/>
+              <a:t>MFL03_DC_Motor_Speed_Control</a:t>
+            </a:r>
+            <a:r>
+              <a:rPr lang="en-GB" sz="1200" b="1" dirty="0"/>
+              <a:t>.ino):</a:t>
             </a:r>
           </a:p>
         </p:txBody>
@@ -5288,59 +5296,6 @@
       </p:sp>
       <p:sp>
         <p:nvSpPr>
-          <p:cNvPr id="13" name="TextBox 12">
-            <a:extLst>
-              <a:ext uri="{FF2B5EF4-FFF2-40B4-BE49-F238E27FC236}">
-                <a16:creationId xmlns:a16="http://schemas.microsoft.com/office/drawing/2014/main" id="{B5CD25E5-C741-0F95-5E51-1E2548380E18}"/>
-              </a:ext>
-            </a:extLst>
-          </p:cNvPr>
-          <p:cNvSpPr txBox="1"/>
-          <p:nvPr/>
-        </p:nvSpPr>
-        <p:spPr>
-          <a:xfrm>
-            <a:off x="340416" y="5587375"/>
-            <a:ext cx="4981161" cy="954107"/>
-          </a:xfrm>
-          <a:prstGeom prst="rect">
-            <a:avLst/>
-          </a:prstGeom>
-          <a:noFill/>
-          <a:ln w="28575">
-            <a:solidFill>
-              <a:schemeClr val="accent1"/>
-            </a:solidFill>
-          </a:ln>
-        </p:spPr>
-        <p:txBody>
-          <a:bodyPr wrap="square">
-            <a:spAutoFit/>
-          </a:bodyPr>
-          <a:lstStyle>
-            <a:defPPr>
-              <a:defRPr lang="en-US"/>
-            </a:defPPr>
-            <a:lvl1pPr>
-              <a:defRPr sz="1400"/>
-            </a:lvl1pPr>
-          </a:lstStyle>
-          <a:p>
-            <a:r>
-              <a:rPr lang="en-GB" dirty="0">
-                <a:hlinkClick r:id="rId2"/>
-              </a:rPr>
-              <a:t>https://github.com/info-zas/zas-robotics-motion/blob/main/01_FoundationProjects/MFL03/MFL03/MFL03.ino</a:t>
-            </a:r>
-            <a:endParaRPr lang="en-GB" dirty="0"/>
-          </a:p>
-          <a:p>
-            <a:endParaRPr lang="en-GB" dirty="0"/>
-          </a:p>
-        </p:txBody>
-      </p:sp>
-      <p:sp>
-        <p:nvSpPr>
           <p:cNvPr id="3" name="Date Placeholder 2">
             <a:extLst>
               <a:ext uri="{FF2B5EF4-FFF2-40B4-BE49-F238E27FC236}">
@@ -5411,7 +5366,7 @@
           <p:nvPr/>
         </p:nvPicPr>
         <p:blipFill>
-          <a:blip r:embed="rId3" cstate="print">
+          <a:blip r:embed="rId2" cstate="print">
             <a:extLst>
               <a:ext uri="{28A0092B-C50C-407E-A947-70E740481C1C}">
                 <a14:useLocalDpi xmlns:a14="http://schemas.microsoft.com/office/drawing/2010/main" val="0"/>
@@ -5516,20 +5471,73 @@
       </p:sp>
       <p:sp>
         <p:nvSpPr>
-          <p:cNvPr id="16" name="TextBox 15">
-            <a:extLst>
-              <a:ext uri="{FF2B5EF4-FFF2-40B4-BE49-F238E27FC236}">
-                <a16:creationId xmlns:a16="http://schemas.microsoft.com/office/drawing/2014/main" id="{228C4F88-0CD1-4F98-C79C-AB89C16108B9}"/>
+          <p:cNvPr id="2" name="TextBox 1">
+            <a:extLst>
+              <a:ext uri="{FF2B5EF4-FFF2-40B4-BE49-F238E27FC236}">
+                <a16:creationId xmlns:a16="http://schemas.microsoft.com/office/drawing/2014/main" id="{F3F92A19-B2CB-470F-032C-33246725B5C4}"/>
               </a:ext>
             </a:extLst>
           </p:cNvPr>
           <p:cNvSpPr txBox="1"/>
           <p:nvPr/>
         </p:nvSpPr>
+        <p:spPr>
+          <a:xfrm>
+            <a:off x="436386" y="5417237"/>
+            <a:ext cx="4885191" cy="954107"/>
+          </a:xfrm>
+          <a:prstGeom prst="rect">
+            <a:avLst/>
+          </a:prstGeom>
+          <a:noFill/>
+          <a:ln w="28575">
+            <a:solidFill>
+              <a:schemeClr val="accent1"/>
+            </a:solidFill>
+          </a:ln>
+        </p:spPr>
+        <p:txBody>
+          <a:bodyPr wrap="square">
+            <a:spAutoFit/>
+          </a:bodyPr>
+          <a:lstStyle>
+            <a:defPPr>
+              <a:defRPr lang="en-US"/>
+            </a:defPPr>
+            <a:lvl1pPr>
+              <a:defRPr sz="1400"/>
+            </a:lvl1pPr>
+          </a:lstStyle>
+          <a:p>
+            <a:r>
+              <a:rPr lang="en-GB" dirty="0">
+                <a:hlinkClick r:id="rId3"/>
+              </a:rPr>
+              <a:t>https://github.com/info-zas/zas-robotics-motion/tree/main/01_FoundationProjects/MFL03_DC_Motor_Speed_Control/MFL03_DC_Motor_Speed_Control</a:t>
+            </a:r>
+            <a:endParaRPr lang="en-GB" dirty="0"/>
+          </a:p>
+          <a:p>
+            <a:endParaRPr lang="en-GB" dirty="0"/>
+          </a:p>
+        </p:txBody>
+      </p:sp>
+      <p:sp>
+        <p:nvSpPr>
+          <p:cNvPr id="5" name="TextBox 4">
+            <a:extLst>
+              <a:ext uri="{FF2B5EF4-FFF2-40B4-BE49-F238E27FC236}">
+                <a16:creationId xmlns:a16="http://schemas.microsoft.com/office/drawing/2014/main" id="{0BC2830A-C1EF-E32D-96CF-CCAD24A62536}"/>
+              </a:ext>
+            </a:extLst>
+          </p:cNvPr>
+          <p:cNvSpPr txBox="1"/>
+          <p:nvPr/>
+        </p:nvSpPr>
         <p:spPr bwMode="auto">
           <a:xfrm>
-            <a:off x="233516" y="5172585"/>
-            <a:ext cx="3952568" cy="369332"/>
+            <a:off x="373432" y="5140238"/>
+            <a:ext cx="5380497" cy="276999"/>
           </a:xfrm>
           <a:prstGeom prst="rect">
             <a:avLst/>
@@ -5640,8 +5648,16 @@
               <a:defRPr/>
             </a:pPr>
             <a:r>
-              <a:rPr lang="en-GB" b="1" dirty="0"/>
-              <a:t>Code for Lesson MFL03 (MFL03.ino):</a:t>
+              <a:rPr lang="en-GB" sz="1200" b="1" dirty="0"/>
+              <a:t>Code for Lesson MFL03 (</a:t>
+            </a:r>
+            <a:r>
+              <a:rPr lang="en-US" sz="1200" b="1" dirty="0"/>
+              <a:t>MFL03_DC_Motor_Speed_Control</a:t>
+            </a:r>
+            <a:r>
+              <a:rPr lang="en-GB" sz="1200" b="1" dirty="0"/>
+              <a:t>.ino):</a:t>
             </a:r>
           </a:p>
         </p:txBody>
@@ -5732,7 +5748,7 @@
                 <a:ea typeface="Calibri Light" panose="020F0302020204030204" pitchFamily="34" charset="0"/>
                 <a:cs typeface="Calibri Light" panose="020F0302020204030204" pitchFamily="34" charset="0"/>
               </a:rPr>
-              <a:t>MFL03_a : </a:t>
+              <a:t>MFL03:</a:t>
             </a:r>
             <a:br>
               <a:rPr lang="en-GB" b="1" dirty="0">
@@ -6076,13 +6092,18 @@
         </p:nvSpPr>
         <p:spPr bwMode="auto">
           <a:xfrm>
-            <a:off x="825912" y="5543382"/>
-            <a:ext cx="4513004" cy="1477328"/>
+            <a:off x="825911" y="5543382"/>
+            <a:ext cx="4983873" cy="1384995"/>
           </a:xfrm>
           <a:prstGeom prst="rect">
             <a:avLst/>
           </a:prstGeom>
           <a:noFill/>
+          <a:ln>
+            <a:solidFill>
+              <a:schemeClr val="accent1"/>
+            </a:solidFill>
+          </a:ln>
         </p:spPr>
         <p:txBody>
           <a:bodyPr wrap="square">
@@ -6188,8 +6209,16 @@
               <a:defRPr/>
             </a:pPr>
             <a:r>
-              <a:rPr lang="en-GB" b="1" dirty="0"/>
-              <a:t>Code for Lesson MFL03_a (MFL03_a.ino):</a:t>
+              <a:rPr lang="en-GB" sz="1400" b="1" dirty="0"/>
+              <a:t>Code for Lesson MFL03 (</a:t>
+            </a:r>
+            <a:r>
+              <a:rPr lang="en-US" sz="1400" b="1" dirty="0"/>
+              <a:t>MFL03_DC_Motor_Speed_Control_OLED</a:t>
+            </a:r>
+            <a:r>
+              <a:rPr lang="en-GB" sz="1400" b="1" dirty="0"/>
+              <a:t>.ino):</a:t>
             </a:r>
           </a:p>
           <a:p>
@@ -6197,18 +6226,18 @@
               <a:defRPr/>
             </a:pPr>
             <a:r>
-              <a:rPr lang="en-GB" b="1" dirty="0">
+              <a:rPr lang="en-GB" sz="1400" b="1" dirty="0">
                 <a:hlinkClick r:id="rId3"/>
               </a:rPr>
-              <a:t>https://github.com/info-zas/zas-robotics-motion/blob/main/01_FoundationProjects/MFL03/MFL03_a/MFL03_a.ino</a:t>
-            </a:r>
-            <a:endParaRPr lang="en-GB" b="1" dirty="0"/>
+              <a:t>https://github.com/info-zas/zas-robotics-motion/tree/main/01_FoundationProjects/MFL03_DC_Motor_Speed_Control/MFL03_DC_Motor_Speed_Control_OLED</a:t>
+            </a:r>
+            <a:endParaRPr lang="en-GB" sz="1400" b="1" dirty="0"/>
           </a:p>
           <a:p>
             <a:pPr>
               <a:defRPr/>
             </a:pPr>
-            <a:endParaRPr lang="en-GB" b="1" dirty="0"/>
+            <a:endParaRPr lang="en-GB" sz="1400" b="1" dirty="0"/>
           </a:p>
         </p:txBody>
       </p:sp>
